--- a/AI赋能语言进阶_最终版.pptx
+++ b/AI赋能语言进阶_最终版.pptx
@@ -13,6 +13,7 @@
     <p:sldId id="261" r:id="rId12"/>
     <p:sldId id="262" r:id="rId13"/>
     <p:sldId id="263" r:id="rId14"/>
+    <p:sldId id="264" r:id="rId15"/>
   </p:sldIdLst>
   <p:sldSz cx="12191695" cy="6858000" type="screen4x3"/>
   <p:notesSz cx="6858000" cy="9144000"/>
@@ -6462,7 +6463,7 @@
               </a:defRPr>
             </a:pPr>
             <a:r>
-              <a:t>同一技术底座，不同能力目标</a:t>
+              <a:t>完整工作流程</a:t>
             </a:r>
           </a:p>
         </p:txBody>
@@ -6476,7 +6477,295 @@
         <p:spPr>
           <a:xfrm>
             <a:off x="457200" y="1097280"/>
-            <a:ext cx="3657600" cy="548640"/>
+            <a:ext cx="5303520" cy="457200"/>
+          </a:xfrm>
+          <a:prstGeom prst="roundRect">
+            <a:avLst/>
+          </a:prstGeom>
+          <a:solidFill>
+            <a:srgbClr val="FF6B35"/>
+          </a:solidFill>
+          <a:ln>
+            <a:noFill/>
+          </a:ln>
+        </p:spPr>
+        <p:style>
+          <a:lnRef idx="1">
+            <a:schemeClr val="accent1"/>
+          </a:lnRef>
+          <a:fillRef idx="3">
+            <a:schemeClr val="accent1"/>
+          </a:fillRef>
+          <a:effectRef idx="2">
+            <a:schemeClr val="accent1"/>
+          </a:effectRef>
+          <a:fontRef idx="minor">
+            <a:schemeClr val="lt1"/>
+          </a:fontRef>
+        </p:style>
+        <p:txBody>
+          <a:bodyPr rtlCol="0" anchor="ctr"/>
+          <a:lstStyle/>
+          <a:p>
+            <a:pPr algn="ctr"/>
+          </a:p>
+        </p:txBody>
+      </p:sp>
+      <p:sp>
+        <p:nvSpPr>
+          <p:cNvPr id="5" name="TextBox 4"/>
+          <p:cNvSpPr txBox="1"/>
+          <p:nvPr/>
+        </p:nvSpPr>
+        <p:spPr>
+          <a:xfrm>
+            <a:off x="457200" y="1097280"/>
+            <a:ext cx="5303520" cy="457200"/>
+          </a:xfrm>
+          <a:prstGeom prst="rect">
+            <a:avLst/>
+          </a:prstGeom>
+          <a:noFill/>
+        </p:spPr>
+        <p:txBody>
+          <a:bodyPr wrap="none">
+            <a:spAutoFit/>
+          </a:bodyPr>
+          <a:lstStyle/>
+          <a:p>
+            <a:pPr algn="ctr">
+              <a:defRPr sz="1800" b="1">
+                <a:solidFill>
+                  <a:srgbClr val="FFFFFF"/>
+                </a:solidFill>
+              </a:defRPr>
+            </a:pPr>
+            <a:r>
+              <a:t>🎯 少儿口语练习工作流</a:t>
+            </a:r>
+          </a:p>
+        </p:txBody>
+      </p:sp>
+      <p:sp>
+        <p:nvSpPr>
+          <p:cNvPr id="6" name="TextBox 5"/>
+          <p:cNvSpPr txBox="1"/>
+          <p:nvPr/>
+        </p:nvSpPr>
+        <p:spPr>
+          <a:xfrm>
+            <a:off x="640080" y="1828800"/>
+            <a:ext cx="4937760" cy="411480"/>
+          </a:xfrm>
+          <a:prstGeom prst="rect">
+            <a:avLst/>
+          </a:prstGeom>
+          <a:noFill/>
+        </p:spPr>
+        <p:txBody>
+          <a:bodyPr wrap="none">
+            <a:spAutoFit/>
+          </a:bodyPr>
+          <a:lstStyle/>
+          <a:p>
+            <a:pPr>
+              <a:defRPr sz="1300">
+                <a:solidFill>
+                  <a:srgbClr val="475569"/>
+                </a:solidFill>
+              </a:defRPr>
+            </a:pPr>
+            <a:r>
+              <a:t>1️⃣ 选择场景：动物园/生日派对/校园</a:t>
+            </a:r>
+          </a:p>
+        </p:txBody>
+      </p:sp>
+      <p:sp>
+        <p:nvSpPr>
+          <p:cNvPr id="7" name="TextBox 6"/>
+          <p:cNvSpPr txBox="1"/>
+          <p:nvPr/>
+        </p:nvSpPr>
+        <p:spPr>
+          <a:xfrm>
+            <a:off x="640080" y="2286000"/>
+            <a:ext cx="4937760" cy="411480"/>
+          </a:xfrm>
+          <a:prstGeom prst="rect">
+            <a:avLst/>
+          </a:prstGeom>
+          <a:noFill/>
+        </p:spPr>
+        <p:txBody>
+          <a:bodyPr wrap="none">
+            <a:spAutoFit/>
+          </a:bodyPr>
+          <a:lstStyle/>
+          <a:p>
+            <a:pPr>
+              <a:defRPr sz="1300">
+                <a:solidFill>
+                  <a:srgbClr val="475569"/>
+                </a:solidFill>
+              </a:defRPr>
+            </a:pPr>
+            <a:r>
+              <a:t>2️⃣ 开始对话：智能体扮演角色互动</a:t>
+            </a:r>
+          </a:p>
+        </p:txBody>
+      </p:sp>
+      <p:sp>
+        <p:nvSpPr>
+          <p:cNvPr id="8" name="TextBox 7"/>
+          <p:cNvSpPr txBox="1"/>
+          <p:nvPr/>
+        </p:nvSpPr>
+        <p:spPr>
+          <a:xfrm>
+            <a:off x="640080" y="2743200"/>
+            <a:ext cx="4937760" cy="411480"/>
+          </a:xfrm>
+          <a:prstGeom prst="rect">
+            <a:avLst/>
+          </a:prstGeom>
+          <a:noFill/>
+        </p:spPr>
+        <p:txBody>
+          <a:bodyPr wrap="none">
+            <a:spAutoFit/>
+          </a:bodyPr>
+          <a:lstStyle/>
+          <a:p>
+            <a:pPr>
+              <a:defRPr sz="1300">
+                <a:solidFill>
+                  <a:srgbClr val="475569"/>
+                </a:solidFill>
+              </a:defRPr>
+            </a:pPr>
+            <a:r>
+              <a:t>3️⃣ 语音输入：孩子自然开口说话</a:t>
+            </a:r>
+          </a:p>
+        </p:txBody>
+      </p:sp>
+      <p:sp>
+        <p:nvSpPr>
+          <p:cNvPr id="9" name="TextBox 8"/>
+          <p:cNvSpPr txBox="1"/>
+          <p:nvPr/>
+        </p:nvSpPr>
+        <p:spPr>
+          <a:xfrm>
+            <a:off x="640080" y="3200400"/>
+            <a:ext cx="4937760" cy="411480"/>
+          </a:xfrm>
+          <a:prstGeom prst="rect">
+            <a:avLst/>
+          </a:prstGeom>
+          <a:noFill/>
+        </p:spPr>
+        <p:txBody>
+          <a:bodyPr wrap="none">
+            <a:spAutoFit/>
+          </a:bodyPr>
+          <a:lstStyle/>
+          <a:p>
+            <a:pPr>
+              <a:defRPr sz="1300">
+                <a:solidFill>
+                  <a:srgbClr val="475569"/>
+                </a:solidFill>
+              </a:defRPr>
+            </a:pPr>
+            <a:r>
+              <a:t>4️⃣ AI识别：分析发音与语义</a:t>
+            </a:r>
+          </a:p>
+        </p:txBody>
+      </p:sp>
+      <p:sp>
+        <p:nvSpPr>
+          <p:cNvPr id="10" name="TextBox 9"/>
+          <p:cNvSpPr txBox="1"/>
+          <p:nvPr/>
+        </p:nvSpPr>
+        <p:spPr>
+          <a:xfrm>
+            <a:off x="640080" y="3657600"/>
+            <a:ext cx="4937760" cy="411480"/>
+          </a:xfrm>
+          <a:prstGeom prst="rect">
+            <a:avLst/>
+          </a:prstGeom>
+          <a:noFill/>
+        </p:spPr>
+        <p:txBody>
+          <a:bodyPr wrap="none">
+            <a:spAutoFit/>
+          </a:bodyPr>
+          <a:lstStyle/>
+          <a:p>
+            <a:pPr>
+              <a:defRPr sz="1300">
+                <a:solidFill>
+                  <a:srgbClr val="475569"/>
+                </a:solidFill>
+              </a:defRPr>
+            </a:pPr>
+            <a:r>
+              <a:t>5️⃣ 智能回应：继续对话并给出鼓励</a:t>
+            </a:r>
+          </a:p>
+        </p:txBody>
+      </p:sp>
+      <p:sp>
+        <p:nvSpPr>
+          <p:cNvPr id="11" name="TextBox 10"/>
+          <p:cNvSpPr txBox="1"/>
+          <p:nvPr/>
+        </p:nvSpPr>
+        <p:spPr>
+          <a:xfrm>
+            <a:off x="640080" y="4114800"/>
+            <a:ext cx="4937760" cy="411480"/>
+          </a:xfrm>
+          <a:prstGeom prst="rect">
+            <a:avLst/>
+          </a:prstGeom>
+          <a:noFill/>
+        </p:spPr>
+        <p:txBody>
+          <a:bodyPr wrap="none">
+            <a:spAutoFit/>
+          </a:bodyPr>
+          <a:lstStyle/>
+          <a:p>
+            <a:pPr>
+              <a:defRPr sz="1300">
+                <a:solidFill>
+                  <a:srgbClr val="475569"/>
+                </a:solidFill>
+              </a:defRPr>
+            </a:pPr>
+            <a:r>
+              <a:t>6️⃣ 勋章奖励：完成对话获得星星</a:t>
+            </a:r>
+          </a:p>
+        </p:txBody>
+      </p:sp>
+      <p:sp>
+        <p:nvSpPr>
+          <p:cNvPr id="12" name="Rounded Rectangle 11"/>
+          <p:cNvSpPr/>
+          <p:nvPr/>
+        </p:nvSpPr>
+        <p:spPr>
+          <a:xfrm>
+            <a:off x="6400800" y="1097280"/>
+            <a:ext cx="5303520" cy="457200"/>
           </a:xfrm>
           <a:prstGeom prst="roundRect">
             <a:avLst/>
@@ -6512,14 +6801,14 @@
       </p:sp>
       <p:sp>
         <p:nvSpPr>
-          <p:cNvPr id="5" name="TextBox 4"/>
-          <p:cNvSpPr txBox="1"/>
-          <p:nvPr/>
-        </p:nvSpPr>
-        <p:spPr>
-          <a:xfrm>
-            <a:off x="457200" y="1097280"/>
-            <a:ext cx="3657600" cy="548640"/>
+          <p:cNvPr id="13" name="TextBox 12"/>
+          <p:cNvSpPr txBox="1"/>
+          <p:nvPr/>
+        </p:nvSpPr>
+        <p:spPr>
+          <a:xfrm>
+            <a:off x="6400800" y="1097280"/>
+            <a:ext cx="5303520" cy="457200"/>
           </a:xfrm>
           <a:prstGeom prst="rect">
             <a:avLst/>
@@ -6540,27 +6829,237 @@
               </a:defRPr>
             </a:pPr>
             <a:r>
-              <a:t>对比项</a:t>
-            </a:r>
-          </a:p>
-        </p:txBody>
-      </p:sp>
-      <p:sp>
-        <p:nvSpPr>
-          <p:cNvPr id="6" name="Rounded Rectangle 5"/>
+              <a:t>💼 三级口译训练工作流</a:t>
+            </a:r>
+          </a:p>
+        </p:txBody>
+      </p:sp>
+      <p:sp>
+        <p:nvSpPr>
+          <p:cNvPr id="14" name="TextBox 13"/>
+          <p:cNvSpPr txBox="1"/>
+          <p:nvPr/>
+        </p:nvSpPr>
+        <p:spPr>
+          <a:xfrm>
+            <a:off x="6583680" y="1828800"/>
+            <a:ext cx="4937760" cy="411480"/>
+          </a:xfrm>
+          <a:prstGeom prst="rect">
+            <a:avLst/>
+          </a:prstGeom>
+          <a:noFill/>
+        </p:spPr>
+        <p:txBody>
+          <a:bodyPr wrap="none">
+            <a:spAutoFit/>
+          </a:bodyPr>
+          <a:lstStyle/>
+          <a:p>
+            <a:pPr>
+              <a:defRPr sz="1300">
+                <a:solidFill>
+                  <a:srgbClr val="475569"/>
+                </a:solidFill>
+              </a:defRPr>
+            </a:pPr>
+            <a:r>
+              <a:t>1️⃣ 选择题型：真题/数字/模拟考</a:t>
+            </a:r>
+          </a:p>
+        </p:txBody>
+      </p:sp>
+      <p:sp>
+        <p:nvSpPr>
+          <p:cNvPr id="15" name="TextBox 14"/>
+          <p:cNvSpPr txBox="1"/>
+          <p:nvPr/>
+        </p:nvSpPr>
+        <p:spPr>
+          <a:xfrm>
+            <a:off x="6583680" y="2286000"/>
+            <a:ext cx="4937760" cy="411480"/>
+          </a:xfrm>
+          <a:prstGeom prst="rect">
+            <a:avLst/>
+          </a:prstGeom>
+          <a:noFill/>
+        </p:spPr>
+        <p:txBody>
+          <a:bodyPr wrap="none">
+            <a:spAutoFit/>
+          </a:bodyPr>
+          <a:lstStyle/>
+          <a:p>
+            <a:pPr>
+              <a:defRPr sz="1300">
+                <a:solidFill>
+                  <a:srgbClr val="475569"/>
+                </a:solidFill>
+              </a:defRPr>
+            </a:pPr>
+            <a:r>
+              <a:t>2️⃣ 播放音频：设定语速（80-140词/分）</a:t>
+            </a:r>
+          </a:p>
+        </p:txBody>
+      </p:sp>
+      <p:sp>
+        <p:nvSpPr>
+          <p:cNvPr id="16" name="TextBox 15"/>
+          <p:cNvSpPr txBox="1"/>
+          <p:nvPr/>
+        </p:nvSpPr>
+        <p:spPr>
+          <a:xfrm>
+            <a:off x="6583680" y="2743200"/>
+            <a:ext cx="4937760" cy="411480"/>
+          </a:xfrm>
+          <a:prstGeom prst="rect">
+            <a:avLst/>
+          </a:prstGeom>
+          <a:noFill/>
+        </p:spPr>
+        <p:txBody>
+          <a:bodyPr wrap="none">
+            <a:spAutoFit/>
+          </a:bodyPr>
+          <a:lstStyle/>
+          <a:p>
+            <a:pPr>
+              <a:defRPr sz="1300">
+                <a:solidFill>
+                  <a:srgbClr val="475569"/>
+                </a:solidFill>
+              </a:defRPr>
+            </a:pPr>
+            <a:r>
+              <a:t>3️⃣ 口译输出：实时录音上传</a:t>
+            </a:r>
+          </a:p>
+        </p:txBody>
+      </p:sp>
+      <p:sp>
+        <p:nvSpPr>
+          <p:cNvPr id="17" name="TextBox 16"/>
+          <p:cNvSpPr txBox="1"/>
+          <p:nvPr/>
+        </p:nvSpPr>
+        <p:spPr>
+          <a:xfrm>
+            <a:off x="6583680" y="3200400"/>
+            <a:ext cx="4937760" cy="411480"/>
+          </a:xfrm>
+          <a:prstGeom prst="rect">
+            <a:avLst/>
+          </a:prstGeom>
+          <a:noFill/>
+        </p:spPr>
+        <p:txBody>
+          <a:bodyPr wrap="none">
+            <a:spAutoFit/>
+          </a:bodyPr>
+          <a:lstStyle/>
+          <a:p>
+            <a:pPr>
+              <a:defRPr sz="1300">
+                <a:solidFill>
+                  <a:srgbClr val="475569"/>
+                </a:solidFill>
+              </a:defRPr>
+            </a:pPr>
+            <a:r>
+              <a:t>4️⃣ AI评分：三维度精准评估</a:t>
+            </a:r>
+          </a:p>
+        </p:txBody>
+      </p:sp>
+      <p:sp>
+        <p:nvSpPr>
+          <p:cNvPr id="18" name="TextBox 17"/>
+          <p:cNvSpPr txBox="1"/>
+          <p:nvPr/>
+        </p:nvSpPr>
+        <p:spPr>
+          <a:xfrm>
+            <a:off x="6583680" y="3657600"/>
+            <a:ext cx="4937760" cy="411480"/>
+          </a:xfrm>
+          <a:prstGeom prst="rect">
+            <a:avLst/>
+          </a:prstGeom>
+          <a:noFill/>
+        </p:spPr>
+        <p:txBody>
+          <a:bodyPr wrap="none">
+            <a:spAutoFit/>
+          </a:bodyPr>
+          <a:lstStyle/>
+          <a:p>
+            <a:pPr>
+              <a:defRPr sz="1300">
+                <a:solidFill>
+                  <a:srgbClr val="475569"/>
+                </a:solidFill>
+              </a:defRPr>
+            </a:pPr>
+            <a:r>
+              <a:t>5️⃣ 查看报告：错误分析+建议</a:t>
+            </a:r>
+          </a:p>
+        </p:txBody>
+      </p:sp>
+      <p:sp>
+        <p:nvSpPr>
+          <p:cNvPr id="19" name="TextBox 18"/>
+          <p:cNvSpPr txBox="1"/>
+          <p:nvPr/>
+        </p:nvSpPr>
+        <p:spPr>
+          <a:xfrm>
+            <a:off x="6583680" y="4114800"/>
+            <a:ext cx="4937760" cy="411480"/>
+          </a:xfrm>
+          <a:prstGeom prst="rect">
+            <a:avLst/>
+          </a:prstGeom>
+          <a:noFill/>
+        </p:spPr>
+        <p:txBody>
+          <a:bodyPr wrap="none">
+            <a:spAutoFit/>
+          </a:bodyPr>
+          <a:lstStyle/>
+          <a:p>
+            <a:pPr>
+              <a:defRPr sz="1300">
+                <a:solidFill>
+                  <a:srgbClr val="475569"/>
+                </a:solidFill>
+              </a:defRPr>
+            </a:pPr>
+            <a:r>
+              <a:t>6️⃣ 继续练习：针对性强化薄弱环节</a:t>
+            </a:r>
+          </a:p>
+        </p:txBody>
+      </p:sp>
+      <p:sp>
+        <p:nvSpPr>
+          <p:cNvPr id="20" name="Rounded Rectangle 19"/>
           <p:cNvSpPr/>
           <p:nvPr/>
         </p:nvSpPr>
         <p:spPr>
           <a:xfrm>
-            <a:off x="4114800" y="1097280"/>
-            <a:ext cx="3657600" cy="548640"/>
+            <a:off x="457200" y="4754880"/>
+            <a:ext cx="10972800" cy="1645920"/>
           </a:xfrm>
           <a:prstGeom prst="roundRect">
             <a:avLst/>
           </a:prstGeom>
           <a:solidFill>
-            <a:srgbClr val="FF6B35"/>
+            <a:srgbClr val="F0F5FF"/>
           </a:solidFill>
           <a:ln>
             <a:noFill/>
@@ -6590,14 +7089,14 @@
       </p:sp>
       <p:sp>
         <p:nvSpPr>
-          <p:cNvPr id="7" name="TextBox 6"/>
-          <p:cNvSpPr txBox="1"/>
-          <p:nvPr/>
-        </p:nvSpPr>
-        <p:spPr>
-          <a:xfrm>
-            <a:off x="4114800" y="1097280"/>
-            <a:ext cx="3657600" cy="548640"/>
+          <p:cNvPr id="21" name="TextBox 20"/>
+          <p:cNvSpPr txBox="1"/>
+          <p:nvPr/>
+        </p:nvSpPr>
+        <p:spPr>
+          <a:xfrm>
+            <a:off x="914400" y="4846320"/>
+            <a:ext cx="10058400" cy="457200"/>
           </a:xfrm>
           <a:prstGeom prst="rect">
             <a:avLst/>
@@ -6611,71 +7110,28 @@
           <a:lstStyle/>
           <a:p>
             <a:pPr algn="ctr">
-              <a:defRPr sz="1800" b="1">
-                <a:solidFill>
-                  <a:srgbClr val="FFFFFF"/>
-                </a:solidFill>
-              </a:defRPr>
-            </a:pPr>
-            <a:r>
-              <a:t>少儿口语</a:t>
-            </a:r>
-          </a:p>
-        </p:txBody>
-      </p:sp>
-      <p:sp>
-        <p:nvSpPr>
-          <p:cNvPr id="8" name="Rounded Rectangle 7"/>
-          <p:cNvSpPr/>
-          <p:nvPr/>
-        </p:nvSpPr>
-        <p:spPr>
-          <a:xfrm>
-            <a:off x="7772400" y="1097280"/>
-            <a:ext cx="3657600" cy="548640"/>
-          </a:xfrm>
-          <a:prstGeom prst="roundRect">
-            <a:avLst/>
-          </a:prstGeom>
-          <a:solidFill>
-            <a:srgbClr val="1E3A5F"/>
-          </a:solidFill>
-          <a:ln>
-            <a:noFill/>
-          </a:ln>
-        </p:spPr>
-        <p:style>
-          <a:lnRef idx="1">
-            <a:schemeClr val="accent1"/>
-          </a:lnRef>
-          <a:fillRef idx="3">
-            <a:schemeClr val="accent1"/>
-          </a:fillRef>
-          <a:effectRef idx="2">
-            <a:schemeClr val="accent1"/>
-          </a:effectRef>
-          <a:fontRef idx="minor">
-            <a:schemeClr val="lt1"/>
-          </a:fontRef>
-        </p:style>
-        <p:txBody>
-          <a:bodyPr rtlCol="0" anchor="ctr"/>
-          <a:lstStyle/>
-          <a:p>
-            <a:pPr algn="ctr"/>
-          </a:p>
-        </p:txBody>
-      </p:sp>
-      <p:sp>
-        <p:nvSpPr>
-          <p:cNvPr id="9" name="TextBox 8"/>
-          <p:cNvSpPr txBox="1"/>
-          <p:nvPr/>
-        </p:nvSpPr>
-        <p:spPr>
-          <a:xfrm>
-            <a:off x="7772400" y="1097280"/>
-            <a:ext cx="3657600" cy="548640"/>
+              <a:defRPr sz="2000" b="1">
+                <a:solidFill>
+                  <a:srgbClr val="1E3A5F"/>
+                </a:solidFill>
+              </a:defRPr>
+            </a:pPr>
+            <a:r>
+              <a:t>🔄 全链路学习协同</a:t>
+            </a:r>
+          </a:p>
+        </p:txBody>
+      </p:sp>
+      <p:sp>
+        <p:nvSpPr>
+          <p:cNvPr id="22" name="TextBox 21"/>
+          <p:cNvSpPr txBox="1"/>
+          <p:nvPr/>
+        </p:nvSpPr>
+        <p:spPr>
+          <a:xfrm>
+            <a:off x="914400" y="5394960"/>
+            <a:ext cx="10058400" cy="822960"/>
           </a:xfrm>
           <a:prstGeom prst="rect">
             <a:avLst/>
@@ -6689,829 +7145,14 @@
           <a:lstStyle/>
           <a:p>
             <a:pPr algn="ctr">
-              <a:defRPr sz="1800" b="1">
-                <a:solidFill>
-                  <a:srgbClr val="FFFFFF"/>
-                </a:solidFill>
-              </a:defRPr>
-            </a:pPr>
-            <a:r>
-              <a:t>三级口译</a:t>
-            </a:r>
-          </a:p>
-        </p:txBody>
-      </p:sp>
-      <p:sp>
-        <p:nvSpPr>
-          <p:cNvPr id="10" name="Rectangle 9"/>
-          <p:cNvSpPr/>
-          <p:nvPr/>
-        </p:nvSpPr>
-        <p:spPr>
-          <a:xfrm>
-            <a:off x="457200" y="1645919"/>
-            <a:ext cx="3657600" cy="731520"/>
-          </a:xfrm>
-          <a:prstGeom prst="rect">
-            <a:avLst/>
-          </a:prstGeom>
-          <a:solidFill>
-            <a:srgbClr val="F0F4F8"/>
-          </a:solidFill>
-          <a:ln>
-            <a:noFill/>
-          </a:ln>
-        </p:spPr>
-        <p:style>
-          <a:lnRef idx="1">
-            <a:schemeClr val="accent1"/>
-          </a:lnRef>
-          <a:fillRef idx="3">
-            <a:schemeClr val="accent1"/>
-          </a:fillRef>
-          <a:effectRef idx="2">
-            <a:schemeClr val="accent1"/>
-          </a:effectRef>
-          <a:fontRef idx="minor">
-            <a:schemeClr val="lt1"/>
-          </a:fontRef>
-        </p:style>
-        <p:txBody>
-          <a:bodyPr rtlCol="0" anchor="ctr"/>
-          <a:lstStyle/>
-          <a:p>
-            <a:pPr algn="ctr"/>
-          </a:p>
-        </p:txBody>
-      </p:sp>
-      <p:sp>
-        <p:nvSpPr>
-          <p:cNvPr id="11" name="TextBox 10"/>
-          <p:cNvSpPr txBox="1"/>
-          <p:nvPr/>
-        </p:nvSpPr>
-        <p:spPr>
-          <a:xfrm>
-            <a:off x="548640" y="1645919"/>
-            <a:ext cx="3474720" cy="731520"/>
-          </a:xfrm>
-          <a:prstGeom prst="rect">
-            <a:avLst/>
-          </a:prstGeom>
-          <a:noFill/>
-        </p:spPr>
-        <p:txBody>
-          <a:bodyPr wrap="none">
-            <a:spAutoFit/>
-          </a:bodyPr>
-          <a:lstStyle/>
-          <a:p>
-            <a:pPr algn="ctr">
-              <a:defRPr sz="1400">
+              <a:defRPr sz="1600" b="1">
                 <a:solidFill>
                   <a:srgbClr val="475569"/>
                 </a:solidFill>
               </a:defRPr>
             </a:pPr>
             <a:r>
-              <a:t>评价标准</a:t>
-            </a:r>
-          </a:p>
-        </p:txBody>
-      </p:sp>
-      <p:sp>
-        <p:nvSpPr>
-          <p:cNvPr id="12" name="Rectangle 11"/>
-          <p:cNvSpPr/>
-          <p:nvPr/>
-        </p:nvSpPr>
-        <p:spPr>
-          <a:xfrm>
-            <a:off x="4114800" y="1645919"/>
-            <a:ext cx="3657600" cy="731520"/>
-          </a:xfrm>
-          <a:prstGeom prst="rect">
-            <a:avLst/>
-          </a:prstGeom>
-          <a:solidFill>
-            <a:srgbClr val="F0F4F8"/>
-          </a:solidFill>
-          <a:ln>
-            <a:noFill/>
-          </a:ln>
-        </p:spPr>
-        <p:style>
-          <a:lnRef idx="1">
-            <a:schemeClr val="accent1"/>
-          </a:lnRef>
-          <a:fillRef idx="3">
-            <a:schemeClr val="accent1"/>
-          </a:fillRef>
-          <a:effectRef idx="2">
-            <a:schemeClr val="accent1"/>
-          </a:effectRef>
-          <a:fontRef idx="minor">
-            <a:schemeClr val="lt1"/>
-          </a:fontRef>
-        </p:style>
-        <p:txBody>
-          <a:bodyPr rtlCol="0" anchor="ctr"/>
-          <a:lstStyle/>
-          <a:p>
-            <a:pPr algn="ctr"/>
-          </a:p>
-        </p:txBody>
-      </p:sp>
-      <p:sp>
-        <p:nvSpPr>
-          <p:cNvPr id="13" name="TextBox 12"/>
-          <p:cNvSpPr txBox="1"/>
-          <p:nvPr/>
-        </p:nvSpPr>
-        <p:spPr>
-          <a:xfrm>
-            <a:off x="4206240" y="1645919"/>
-            <a:ext cx="3474720" cy="731520"/>
-          </a:xfrm>
-          <a:prstGeom prst="rect">
-            <a:avLst/>
-          </a:prstGeom>
-          <a:noFill/>
-        </p:spPr>
-        <p:txBody>
-          <a:bodyPr wrap="none">
-            <a:spAutoFit/>
-          </a:bodyPr>
-          <a:lstStyle/>
-          <a:p>
-            <a:pPr algn="ctr">
-              <a:defRPr sz="1400">
-                <a:solidFill>
-                  <a:srgbClr val="475569"/>
-                </a:solidFill>
-              </a:defRPr>
-            </a:pPr>
-            <a:r>
-              <a:t>鼓励为主 + 可理解性</a:t>
-            </a:r>
-          </a:p>
-        </p:txBody>
-      </p:sp>
-      <p:sp>
-        <p:nvSpPr>
-          <p:cNvPr id="14" name="Rectangle 13"/>
-          <p:cNvSpPr/>
-          <p:nvPr/>
-        </p:nvSpPr>
-        <p:spPr>
-          <a:xfrm>
-            <a:off x="7772400" y="1645919"/>
-            <a:ext cx="3657600" cy="731520"/>
-          </a:xfrm>
-          <a:prstGeom prst="rect">
-            <a:avLst/>
-          </a:prstGeom>
-          <a:solidFill>
-            <a:srgbClr val="F0F4F8"/>
-          </a:solidFill>
-          <a:ln>
-            <a:noFill/>
-          </a:ln>
-        </p:spPr>
-        <p:style>
-          <a:lnRef idx="1">
-            <a:schemeClr val="accent1"/>
-          </a:lnRef>
-          <a:fillRef idx="3">
-            <a:schemeClr val="accent1"/>
-          </a:fillRef>
-          <a:effectRef idx="2">
-            <a:schemeClr val="accent1"/>
-          </a:effectRef>
-          <a:fontRef idx="minor">
-            <a:schemeClr val="lt1"/>
-          </a:fontRef>
-        </p:style>
-        <p:txBody>
-          <a:bodyPr rtlCol="0" anchor="ctr"/>
-          <a:lstStyle/>
-          <a:p>
-            <a:pPr algn="ctr"/>
-          </a:p>
-        </p:txBody>
-      </p:sp>
-      <p:sp>
-        <p:nvSpPr>
-          <p:cNvPr id="15" name="TextBox 14"/>
-          <p:cNvSpPr txBox="1"/>
-          <p:nvPr/>
-        </p:nvSpPr>
-        <p:spPr>
-          <a:xfrm>
-            <a:off x="7863840" y="1645919"/>
-            <a:ext cx="3474720" cy="731520"/>
-          </a:xfrm>
-          <a:prstGeom prst="rect">
-            <a:avLst/>
-          </a:prstGeom>
-          <a:noFill/>
-        </p:spPr>
-        <p:txBody>
-          <a:bodyPr wrap="none">
-            <a:spAutoFit/>
-          </a:bodyPr>
-          <a:lstStyle/>
-          <a:p>
-            <a:pPr algn="ctr">
-              <a:defRPr sz="1400">
-                <a:solidFill>
-                  <a:srgbClr val="475569"/>
-                </a:solidFill>
-              </a:defRPr>
-            </a:pPr>
-            <a:r>
-              <a:t>专业评分 + 信息保真</a:t>
-            </a:r>
-          </a:p>
-        </p:txBody>
-      </p:sp>
-      <p:sp>
-        <p:nvSpPr>
-          <p:cNvPr id="16" name="Rectangle 15"/>
-          <p:cNvSpPr/>
-          <p:nvPr/>
-        </p:nvSpPr>
-        <p:spPr>
-          <a:xfrm>
-            <a:off x="457200" y="2377439"/>
-            <a:ext cx="3657600" cy="731520"/>
-          </a:xfrm>
-          <a:prstGeom prst="rect">
-            <a:avLst/>
-          </a:prstGeom>
-          <a:solidFill>
-            <a:srgbClr val="FFFFFF"/>
-          </a:solidFill>
-          <a:ln>
-            <a:noFill/>
-          </a:ln>
-        </p:spPr>
-        <p:style>
-          <a:lnRef idx="1">
-            <a:schemeClr val="accent1"/>
-          </a:lnRef>
-          <a:fillRef idx="3">
-            <a:schemeClr val="accent1"/>
-          </a:fillRef>
-          <a:effectRef idx="2">
-            <a:schemeClr val="accent1"/>
-          </a:effectRef>
-          <a:fontRef idx="minor">
-            <a:schemeClr val="lt1"/>
-          </a:fontRef>
-        </p:style>
-        <p:txBody>
-          <a:bodyPr rtlCol="0" anchor="ctr"/>
-          <a:lstStyle/>
-          <a:p>
-            <a:pPr algn="ctr"/>
-          </a:p>
-        </p:txBody>
-      </p:sp>
-      <p:sp>
-        <p:nvSpPr>
-          <p:cNvPr id="17" name="TextBox 16"/>
-          <p:cNvSpPr txBox="1"/>
-          <p:nvPr/>
-        </p:nvSpPr>
-        <p:spPr>
-          <a:xfrm>
-            <a:off x="548640" y="2377439"/>
-            <a:ext cx="3474720" cy="731520"/>
-          </a:xfrm>
-          <a:prstGeom prst="rect">
-            <a:avLst/>
-          </a:prstGeom>
-          <a:noFill/>
-        </p:spPr>
-        <p:txBody>
-          <a:bodyPr wrap="none">
-            <a:spAutoFit/>
-          </a:bodyPr>
-          <a:lstStyle/>
-          <a:p>
-            <a:pPr algn="ctr">
-              <a:defRPr sz="1400">
-                <a:solidFill>
-                  <a:srgbClr val="475569"/>
-                </a:solidFill>
-              </a:defRPr>
-            </a:pPr>
-            <a:r>
-              <a:t>反馈方式</a:t>
-            </a:r>
-          </a:p>
-        </p:txBody>
-      </p:sp>
-      <p:sp>
-        <p:nvSpPr>
-          <p:cNvPr id="18" name="Rectangle 17"/>
-          <p:cNvSpPr/>
-          <p:nvPr/>
-        </p:nvSpPr>
-        <p:spPr>
-          <a:xfrm>
-            <a:off x="4114800" y="2377439"/>
-            <a:ext cx="3657600" cy="731520"/>
-          </a:xfrm>
-          <a:prstGeom prst="rect">
-            <a:avLst/>
-          </a:prstGeom>
-          <a:solidFill>
-            <a:srgbClr val="FFFFFF"/>
-          </a:solidFill>
-          <a:ln>
-            <a:noFill/>
-          </a:ln>
-        </p:spPr>
-        <p:style>
-          <a:lnRef idx="1">
-            <a:schemeClr val="accent1"/>
-          </a:lnRef>
-          <a:fillRef idx="3">
-            <a:schemeClr val="accent1"/>
-          </a:fillRef>
-          <a:effectRef idx="2">
-            <a:schemeClr val="accent1"/>
-          </a:effectRef>
-          <a:fontRef idx="minor">
-            <a:schemeClr val="lt1"/>
-          </a:fontRef>
-        </p:style>
-        <p:txBody>
-          <a:bodyPr rtlCol="0" anchor="ctr"/>
-          <a:lstStyle/>
-          <a:p>
-            <a:pPr algn="ctr"/>
-          </a:p>
-        </p:txBody>
-      </p:sp>
-      <p:sp>
-        <p:nvSpPr>
-          <p:cNvPr id="19" name="TextBox 18"/>
-          <p:cNvSpPr txBox="1"/>
-          <p:nvPr/>
-        </p:nvSpPr>
-        <p:spPr>
-          <a:xfrm>
-            <a:off x="4206240" y="2377439"/>
-            <a:ext cx="3474720" cy="731520"/>
-          </a:xfrm>
-          <a:prstGeom prst="rect">
-            <a:avLst/>
-          </a:prstGeom>
-          <a:noFill/>
-        </p:spPr>
-        <p:txBody>
-          <a:bodyPr wrap="none">
-            <a:spAutoFit/>
-          </a:bodyPr>
-          <a:lstStyle/>
-          <a:p>
-            <a:pPr algn="ctr">
-              <a:defRPr sz="1400">
-                <a:solidFill>
-                  <a:srgbClr val="475569"/>
-                </a:solidFill>
-              </a:defRPr>
-            </a:pPr>
-            <a:r>
-              <a:t>动画 + 语音表情</a:t>
-            </a:r>
-          </a:p>
-        </p:txBody>
-      </p:sp>
-      <p:sp>
-        <p:nvSpPr>
-          <p:cNvPr id="20" name="Rectangle 19"/>
-          <p:cNvSpPr/>
-          <p:nvPr/>
-        </p:nvSpPr>
-        <p:spPr>
-          <a:xfrm>
-            <a:off x="7772400" y="2377439"/>
-            <a:ext cx="3657600" cy="731520"/>
-          </a:xfrm>
-          <a:prstGeom prst="rect">
-            <a:avLst/>
-          </a:prstGeom>
-          <a:solidFill>
-            <a:srgbClr val="FFFFFF"/>
-          </a:solidFill>
-          <a:ln>
-            <a:noFill/>
-          </a:ln>
-        </p:spPr>
-        <p:style>
-          <a:lnRef idx="1">
-            <a:schemeClr val="accent1"/>
-          </a:lnRef>
-          <a:fillRef idx="3">
-            <a:schemeClr val="accent1"/>
-          </a:fillRef>
-          <a:effectRef idx="2">
-            <a:schemeClr val="accent1"/>
-          </a:effectRef>
-          <a:fontRef idx="minor">
-            <a:schemeClr val="lt1"/>
-          </a:fontRef>
-        </p:style>
-        <p:txBody>
-          <a:bodyPr rtlCol="0" anchor="ctr"/>
-          <a:lstStyle/>
-          <a:p>
-            <a:pPr algn="ctr"/>
-          </a:p>
-        </p:txBody>
-      </p:sp>
-      <p:sp>
-        <p:nvSpPr>
-          <p:cNvPr id="21" name="TextBox 20"/>
-          <p:cNvSpPr txBox="1"/>
-          <p:nvPr/>
-        </p:nvSpPr>
-        <p:spPr>
-          <a:xfrm>
-            <a:off x="7863840" y="2377439"/>
-            <a:ext cx="3474720" cy="731520"/>
-          </a:xfrm>
-          <a:prstGeom prst="rect">
-            <a:avLst/>
-          </a:prstGeom>
-          <a:noFill/>
-        </p:spPr>
-        <p:txBody>
-          <a:bodyPr wrap="none">
-            <a:spAutoFit/>
-          </a:bodyPr>
-          <a:lstStyle/>
-          <a:p>
-            <a:pPr algn="ctr">
-              <a:defRPr sz="1400">
-                <a:solidFill>
-                  <a:srgbClr val="475569"/>
-                </a:solidFill>
-              </a:defRPr>
-            </a:pPr>
-            <a:r>
-              <a:t>文本报告 + 波形对比</a:t>
-            </a:r>
-          </a:p>
-        </p:txBody>
-      </p:sp>
-      <p:sp>
-        <p:nvSpPr>
-          <p:cNvPr id="22" name="Rectangle 21"/>
-          <p:cNvSpPr/>
-          <p:nvPr/>
-        </p:nvSpPr>
-        <p:spPr>
-          <a:xfrm>
-            <a:off x="457200" y="3108959"/>
-            <a:ext cx="3657600" cy="731520"/>
-          </a:xfrm>
-          <a:prstGeom prst="rect">
-            <a:avLst/>
-          </a:prstGeom>
-          <a:solidFill>
-            <a:srgbClr val="F0F4F8"/>
-          </a:solidFill>
-          <a:ln>
-            <a:noFill/>
-          </a:ln>
-        </p:spPr>
-        <p:style>
-          <a:lnRef idx="1">
-            <a:schemeClr val="accent1"/>
-          </a:lnRef>
-          <a:fillRef idx="3">
-            <a:schemeClr val="accent1"/>
-          </a:fillRef>
-          <a:effectRef idx="2">
-            <a:schemeClr val="accent1"/>
-          </a:effectRef>
-          <a:fontRef idx="minor">
-            <a:schemeClr val="lt1"/>
-          </a:fontRef>
-        </p:style>
-        <p:txBody>
-          <a:bodyPr rtlCol="0" anchor="ctr"/>
-          <a:lstStyle/>
-          <a:p>
-            <a:pPr algn="ctr"/>
-          </a:p>
-        </p:txBody>
-      </p:sp>
-      <p:sp>
-        <p:nvSpPr>
-          <p:cNvPr id="23" name="TextBox 22"/>
-          <p:cNvSpPr txBox="1"/>
-          <p:nvPr/>
-        </p:nvSpPr>
-        <p:spPr>
-          <a:xfrm>
-            <a:off x="548640" y="3108959"/>
-            <a:ext cx="3474720" cy="731520"/>
-          </a:xfrm>
-          <a:prstGeom prst="rect">
-            <a:avLst/>
-          </a:prstGeom>
-          <a:noFill/>
-        </p:spPr>
-        <p:txBody>
-          <a:bodyPr wrap="none">
-            <a:spAutoFit/>
-          </a:bodyPr>
-          <a:lstStyle/>
-          <a:p>
-            <a:pPr algn="ctr">
-              <a:defRPr sz="1400">
-                <a:solidFill>
-                  <a:srgbClr val="475569"/>
-                </a:solidFill>
-              </a:defRPr>
-            </a:pPr>
-            <a:r>
-              <a:t>学习时长</a:t>
-            </a:r>
-          </a:p>
-        </p:txBody>
-      </p:sp>
-      <p:sp>
-        <p:nvSpPr>
-          <p:cNvPr id="24" name="Rectangle 23"/>
-          <p:cNvSpPr/>
-          <p:nvPr/>
-        </p:nvSpPr>
-        <p:spPr>
-          <a:xfrm>
-            <a:off x="4114800" y="3108959"/>
-            <a:ext cx="3657600" cy="731520"/>
-          </a:xfrm>
-          <a:prstGeom prst="rect">
-            <a:avLst/>
-          </a:prstGeom>
-          <a:solidFill>
-            <a:srgbClr val="F0F4F8"/>
-          </a:solidFill>
-          <a:ln>
-            <a:noFill/>
-          </a:ln>
-        </p:spPr>
-        <p:style>
-          <a:lnRef idx="1">
-            <a:schemeClr val="accent1"/>
-          </a:lnRef>
-          <a:fillRef idx="3">
-            <a:schemeClr val="accent1"/>
-          </a:fillRef>
-          <a:effectRef idx="2">
-            <a:schemeClr val="accent1"/>
-          </a:effectRef>
-          <a:fontRef idx="minor">
-            <a:schemeClr val="lt1"/>
-          </a:fontRef>
-        </p:style>
-        <p:txBody>
-          <a:bodyPr rtlCol="0" anchor="ctr"/>
-          <a:lstStyle/>
-          <a:p>
-            <a:pPr algn="ctr"/>
-          </a:p>
-        </p:txBody>
-      </p:sp>
-      <p:sp>
-        <p:nvSpPr>
-          <p:cNvPr id="25" name="TextBox 24"/>
-          <p:cNvSpPr txBox="1"/>
-          <p:nvPr/>
-        </p:nvSpPr>
-        <p:spPr>
-          <a:xfrm>
-            <a:off x="4206240" y="3108959"/>
-            <a:ext cx="3474720" cy="731520"/>
-          </a:xfrm>
-          <a:prstGeom prst="rect">
-            <a:avLst/>
-          </a:prstGeom>
-          <a:noFill/>
-        </p:spPr>
-        <p:txBody>
-          <a:bodyPr wrap="none">
-            <a:spAutoFit/>
-          </a:bodyPr>
-          <a:lstStyle/>
-          <a:p>
-            <a:pPr algn="ctr">
-              <a:defRPr sz="1400">
-                <a:solidFill>
-                  <a:srgbClr val="475569"/>
-                </a:solidFill>
-              </a:defRPr>
-            </a:pPr>
-            <a:r>
-              <a:t>5–15分钟/次</a:t>
-            </a:r>
-          </a:p>
-        </p:txBody>
-      </p:sp>
-      <p:sp>
-        <p:nvSpPr>
-          <p:cNvPr id="26" name="Rectangle 25"/>
-          <p:cNvSpPr/>
-          <p:nvPr/>
-        </p:nvSpPr>
-        <p:spPr>
-          <a:xfrm>
-            <a:off x="7772400" y="3108959"/>
-            <a:ext cx="3657600" cy="731520"/>
-          </a:xfrm>
-          <a:prstGeom prst="rect">
-            <a:avLst/>
-          </a:prstGeom>
-          <a:solidFill>
-            <a:srgbClr val="F0F4F8"/>
-          </a:solidFill>
-          <a:ln>
-            <a:noFill/>
-          </a:ln>
-        </p:spPr>
-        <p:style>
-          <a:lnRef idx="1">
-            <a:schemeClr val="accent1"/>
-          </a:lnRef>
-          <a:fillRef idx="3">
-            <a:schemeClr val="accent1"/>
-          </a:fillRef>
-          <a:effectRef idx="2">
-            <a:schemeClr val="accent1"/>
-          </a:effectRef>
-          <a:fontRef idx="minor">
-            <a:schemeClr val="lt1"/>
-          </a:fontRef>
-        </p:style>
-        <p:txBody>
-          <a:bodyPr rtlCol="0" anchor="ctr"/>
-          <a:lstStyle/>
-          <a:p>
-            <a:pPr algn="ctr"/>
-          </a:p>
-        </p:txBody>
-      </p:sp>
-      <p:sp>
-        <p:nvSpPr>
-          <p:cNvPr id="27" name="TextBox 26"/>
-          <p:cNvSpPr txBox="1"/>
-          <p:nvPr/>
-        </p:nvSpPr>
-        <p:spPr>
-          <a:xfrm>
-            <a:off x="7863840" y="3108959"/>
-            <a:ext cx="3474720" cy="731520"/>
-          </a:xfrm>
-          <a:prstGeom prst="rect">
-            <a:avLst/>
-          </a:prstGeom>
-          <a:noFill/>
-        </p:spPr>
-        <p:txBody>
-          <a:bodyPr wrap="none">
-            <a:spAutoFit/>
-          </a:bodyPr>
-          <a:lstStyle/>
-          <a:p>
-            <a:pPr algn="ctr">
-              <a:defRPr sz="1400">
-                <a:solidFill>
-                  <a:srgbClr val="475569"/>
-                </a:solidFill>
-              </a:defRPr>
-            </a:pPr>
-            <a:r>
-              <a:t>20–45分钟/次</a:t>
-            </a:r>
-          </a:p>
-        </p:txBody>
-      </p:sp>
-      <p:sp>
-        <p:nvSpPr>
-          <p:cNvPr id="28" name="Rounded Rectangle 27"/>
-          <p:cNvSpPr/>
-          <p:nvPr/>
-        </p:nvSpPr>
-        <p:spPr>
-          <a:xfrm>
-            <a:off x="457200" y="4572000"/>
-            <a:ext cx="10972800" cy="1371600"/>
-          </a:xfrm>
-          <a:prstGeom prst="roundRect">
-            <a:avLst/>
-          </a:prstGeom>
-          <a:solidFill>
-            <a:srgbClr val="F8FAFC"/>
-          </a:solidFill>
-          <a:ln>
-            <a:noFill/>
-          </a:ln>
-        </p:spPr>
-        <p:style>
-          <a:lnRef idx="1">
-            <a:schemeClr val="accent1"/>
-          </a:lnRef>
-          <a:fillRef idx="3">
-            <a:schemeClr val="accent1"/>
-          </a:fillRef>
-          <a:effectRef idx="2">
-            <a:schemeClr val="accent1"/>
-          </a:effectRef>
-          <a:fontRef idx="minor">
-            <a:schemeClr val="lt1"/>
-          </a:fontRef>
-        </p:style>
-        <p:txBody>
-          <a:bodyPr rtlCol="0" anchor="ctr"/>
-          <a:lstStyle/>
-          <a:p>
-            <a:pPr algn="ctr"/>
-          </a:p>
-        </p:txBody>
-      </p:sp>
-      <p:sp>
-        <p:nvSpPr>
-          <p:cNvPr id="29" name="TextBox 28"/>
-          <p:cNvSpPr txBox="1"/>
-          <p:nvPr/>
-        </p:nvSpPr>
-        <p:spPr>
-          <a:xfrm>
-            <a:off x="731520" y="4572000"/>
-            <a:ext cx="10058400" cy="365760"/>
-          </a:xfrm>
-          <a:prstGeom prst="rect">
-            <a:avLst/>
-          </a:prstGeom>
-          <a:noFill/>
-        </p:spPr>
-        <p:txBody>
-          <a:bodyPr wrap="none">
-            <a:spAutoFit/>
-          </a:bodyPr>
-          <a:lstStyle/>
-          <a:p>
-            <a:pPr>
-              <a:defRPr sz="2000" b="1">
-                <a:solidFill>
-                  <a:srgbClr val="FF6B35"/>
-                </a:solidFill>
-              </a:defRPr>
-            </a:pPr>
-            <a:r>
-              <a:t>✨ 协同可能</a:t>
-            </a:r>
-          </a:p>
-        </p:txBody>
-      </p:sp>
-      <p:sp>
-        <p:nvSpPr>
-          <p:cNvPr id="30" name="TextBox 29"/>
-          <p:cNvSpPr txBox="1"/>
-          <p:nvPr/>
-        </p:nvSpPr>
-        <p:spPr>
-          <a:xfrm>
-            <a:off x="731520" y="5029200"/>
-            <a:ext cx="10058400" cy="731520"/>
-          </a:xfrm>
-          <a:prstGeom prst="rect">
-            <a:avLst/>
-          </a:prstGeom>
-          <a:noFill/>
-        </p:spPr>
-        <p:txBody>
-          <a:bodyPr wrap="none">
-            <a:spAutoFit/>
-          </a:bodyPr>
-          <a:lstStyle/>
-          <a:p>
-            <a:pPr algn="ctr">
-              <a:defRPr sz="1600">
-                <a:solidFill>
-                  <a:srgbClr val="475569"/>
-                </a:solidFill>
-              </a:defRPr>
-            </a:pPr>
-            <a:r>
-              <a:t>少儿智能体积累的发音自信 + 语感 → 未来切入口译训练时焦虑感降低，语音识别自我修正能力更强。</a:t>
+              <a:t>4-12岁：少儿口语启蒙 → 建立自信 → 培养语感 → 18岁+：三级口译进阶 → 专业训练 → 考试通关</a:t>
             </a:r>
           </a:p>
         </p:txBody>
@@ -7525,6 +7166,1151 @@
 </file>
 
 <file path=ppt/slides/slide8.xml><?xml version="1.0" encoding="utf-8"?>
+<p:sld xmlns:a="http://schemas.openxmlformats.org/drawingml/2006/main" xmlns:p="http://schemas.openxmlformats.org/presentationml/2006/main" xmlns:r="http://schemas.openxmlformats.org/officeDocument/2006/relationships">
+  <p:cSld>
+    <p:spTree>
+      <p:nvGrpSpPr>
+        <p:cNvPr id="1" name=""/>
+        <p:cNvGrpSpPr/>
+        <p:nvPr/>
+      </p:nvGrpSpPr>
+      <p:grpSpPr/>
+      <p:sp>
+        <p:nvSpPr>
+          <p:cNvPr id="2" name="Rectangle 1"/>
+          <p:cNvSpPr/>
+          <p:nvPr/>
+        </p:nvSpPr>
+        <p:spPr>
+          <a:xfrm>
+            <a:off x="0" y="0"/>
+            <a:ext cx="12191695" cy="6858000"/>
+          </a:xfrm>
+          <a:prstGeom prst="rect">
+            <a:avLst/>
+          </a:prstGeom>
+          <a:solidFill>
+            <a:srgbClr val="F5F7FA"/>
+          </a:solidFill>
+          <a:ln>
+            <a:noFill/>
+          </a:ln>
+        </p:spPr>
+        <p:style>
+          <a:lnRef idx="1">
+            <a:schemeClr val="accent1"/>
+          </a:lnRef>
+          <a:fillRef idx="3">
+            <a:schemeClr val="accent1"/>
+          </a:fillRef>
+          <a:effectRef idx="2">
+            <a:schemeClr val="accent1"/>
+          </a:effectRef>
+          <a:fontRef idx="minor">
+            <a:schemeClr val="lt1"/>
+          </a:fontRef>
+        </p:style>
+        <p:txBody>
+          <a:bodyPr rtlCol="0" anchor="ctr"/>
+          <a:lstStyle/>
+          <a:p>
+            <a:pPr algn="ctr"/>
+          </a:p>
+        </p:txBody>
+      </p:sp>
+      <p:sp>
+        <p:nvSpPr>
+          <p:cNvPr id="3" name="TextBox 2"/>
+          <p:cNvSpPr txBox="1"/>
+          <p:nvPr/>
+        </p:nvSpPr>
+        <p:spPr>
+          <a:xfrm>
+            <a:off x="457200" y="274320"/>
+            <a:ext cx="10972800" cy="640080"/>
+          </a:xfrm>
+          <a:prstGeom prst="rect">
+            <a:avLst/>
+          </a:prstGeom>
+          <a:noFill/>
+        </p:spPr>
+        <p:txBody>
+          <a:bodyPr wrap="none">
+            <a:spAutoFit/>
+          </a:bodyPr>
+          <a:lstStyle/>
+          <a:p>
+            <a:pPr>
+              <a:defRPr sz="3600" b="1">
+                <a:solidFill>
+                  <a:srgbClr val="1E3A5F"/>
+                </a:solidFill>
+              </a:defRPr>
+            </a:pPr>
+            <a:r>
+              <a:t>同一技术底座，不同能力目标</a:t>
+            </a:r>
+          </a:p>
+        </p:txBody>
+      </p:sp>
+      <p:sp>
+        <p:nvSpPr>
+          <p:cNvPr id="4" name="Rounded Rectangle 3"/>
+          <p:cNvSpPr/>
+          <p:nvPr/>
+        </p:nvSpPr>
+        <p:spPr>
+          <a:xfrm>
+            <a:off x="457200" y="1097280"/>
+            <a:ext cx="3657600" cy="548640"/>
+          </a:xfrm>
+          <a:prstGeom prst="roundRect">
+            <a:avLst/>
+          </a:prstGeom>
+          <a:solidFill>
+            <a:srgbClr val="1E3A5F"/>
+          </a:solidFill>
+          <a:ln>
+            <a:noFill/>
+          </a:ln>
+        </p:spPr>
+        <p:style>
+          <a:lnRef idx="1">
+            <a:schemeClr val="accent1"/>
+          </a:lnRef>
+          <a:fillRef idx="3">
+            <a:schemeClr val="accent1"/>
+          </a:fillRef>
+          <a:effectRef idx="2">
+            <a:schemeClr val="accent1"/>
+          </a:effectRef>
+          <a:fontRef idx="minor">
+            <a:schemeClr val="lt1"/>
+          </a:fontRef>
+        </p:style>
+        <p:txBody>
+          <a:bodyPr rtlCol="0" anchor="ctr"/>
+          <a:lstStyle/>
+          <a:p>
+            <a:pPr algn="ctr"/>
+          </a:p>
+        </p:txBody>
+      </p:sp>
+      <p:sp>
+        <p:nvSpPr>
+          <p:cNvPr id="5" name="TextBox 4"/>
+          <p:cNvSpPr txBox="1"/>
+          <p:nvPr/>
+        </p:nvSpPr>
+        <p:spPr>
+          <a:xfrm>
+            <a:off x="457200" y="1097280"/>
+            <a:ext cx="3657600" cy="548640"/>
+          </a:xfrm>
+          <a:prstGeom prst="rect">
+            <a:avLst/>
+          </a:prstGeom>
+          <a:noFill/>
+        </p:spPr>
+        <p:txBody>
+          <a:bodyPr wrap="none">
+            <a:spAutoFit/>
+          </a:bodyPr>
+          <a:lstStyle/>
+          <a:p>
+            <a:pPr algn="ctr">
+              <a:defRPr sz="1800" b="1">
+                <a:solidFill>
+                  <a:srgbClr val="FFFFFF"/>
+                </a:solidFill>
+              </a:defRPr>
+            </a:pPr>
+            <a:r>
+              <a:t>对比项</a:t>
+            </a:r>
+          </a:p>
+        </p:txBody>
+      </p:sp>
+      <p:sp>
+        <p:nvSpPr>
+          <p:cNvPr id="6" name="Rounded Rectangle 5"/>
+          <p:cNvSpPr/>
+          <p:nvPr/>
+        </p:nvSpPr>
+        <p:spPr>
+          <a:xfrm>
+            <a:off x="4114800" y="1097280"/>
+            <a:ext cx="3657600" cy="548640"/>
+          </a:xfrm>
+          <a:prstGeom prst="roundRect">
+            <a:avLst/>
+          </a:prstGeom>
+          <a:solidFill>
+            <a:srgbClr val="FF6B35"/>
+          </a:solidFill>
+          <a:ln>
+            <a:noFill/>
+          </a:ln>
+        </p:spPr>
+        <p:style>
+          <a:lnRef idx="1">
+            <a:schemeClr val="accent1"/>
+          </a:lnRef>
+          <a:fillRef idx="3">
+            <a:schemeClr val="accent1"/>
+          </a:fillRef>
+          <a:effectRef idx="2">
+            <a:schemeClr val="accent1"/>
+          </a:effectRef>
+          <a:fontRef idx="minor">
+            <a:schemeClr val="lt1"/>
+          </a:fontRef>
+        </p:style>
+        <p:txBody>
+          <a:bodyPr rtlCol="0" anchor="ctr"/>
+          <a:lstStyle/>
+          <a:p>
+            <a:pPr algn="ctr"/>
+          </a:p>
+        </p:txBody>
+      </p:sp>
+      <p:sp>
+        <p:nvSpPr>
+          <p:cNvPr id="7" name="TextBox 6"/>
+          <p:cNvSpPr txBox="1"/>
+          <p:nvPr/>
+        </p:nvSpPr>
+        <p:spPr>
+          <a:xfrm>
+            <a:off x="4114800" y="1097280"/>
+            <a:ext cx="3657600" cy="548640"/>
+          </a:xfrm>
+          <a:prstGeom prst="rect">
+            <a:avLst/>
+          </a:prstGeom>
+          <a:noFill/>
+        </p:spPr>
+        <p:txBody>
+          <a:bodyPr wrap="none">
+            <a:spAutoFit/>
+          </a:bodyPr>
+          <a:lstStyle/>
+          <a:p>
+            <a:pPr algn="ctr">
+              <a:defRPr sz="1800" b="1">
+                <a:solidFill>
+                  <a:srgbClr val="FFFFFF"/>
+                </a:solidFill>
+              </a:defRPr>
+            </a:pPr>
+            <a:r>
+              <a:t>少儿口语</a:t>
+            </a:r>
+          </a:p>
+        </p:txBody>
+      </p:sp>
+      <p:sp>
+        <p:nvSpPr>
+          <p:cNvPr id="8" name="Rounded Rectangle 7"/>
+          <p:cNvSpPr/>
+          <p:nvPr/>
+        </p:nvSpPr>
+        <p:spPr>
+          <a:xfrm>
+            <a:off x="7772400" y="1097280"/>
+            <a:ext cx="3657600" cy="548640"/>
+          </a:xfrm>
+          <a:prstGeom prst="roundRect">
+            <a:avLst/>
+          </a:prstGeom>
+          <a:solidFill>
+            <a:srgbClr val="1E3A5F"/>
+          </a:solidFill>
+          <a:ln>
+            <a:noFill/>
+          </a:ln>
+        </p:spPr>
+        <p:style>
+          <a:lnRef idx="1">
+            <a:schemeClr val="accent1"/>
+          </a:lnRef>
+          <a:fillRef idx="3">
+            <a:schemeClr val="accent1"/>
+          </a:fillRef>
+          <a:effectRef idx="2">
+            <a:schemeClr val="accent1"/>
+          </a:effectRef>
+          <a:fontRef idx="minor">
+            <a:schemeClr val="lt1"/>
+          </a:fontRef>
+        </p:style>
+        <p:txBody>
+          <a:bodyPr rtlCol="0" anchor="ctr"/>
+          <a:lstStyle/>
+          <a:p>
+            <a:pPr algn="ctr"/>
+          </a:p>
+        </p:txBody>
+      </p:sp>
+      <p:sp>
+        <p:nvSpPr>
+          <p:cNvPr id="9" name="TextBox 8"/>
+          <p:cNvSpPr txBox="1"/>
+          <p:nvPr/>
+        </p:nvSpPr>
+        <p:spPr>
+          <a:xfrm>
+            <a:off x="7772400" y="1097280"/>
+            <a:ext cx="3657600" cy="548640"/>
+          </a:xfrm>
+          <a:prstGeom prst="rect">
+            <a:avLst/>
+          </a:prstGeom>
+          <a:noFill/>
+        </p:spPr>
+        <p:txBody>
+          <a:bodyPr wrap="none">
+            <a:spAutoFit/>
+          </a:bodyPr>
+          <a:lstStyle/>
+          <a:p>
+            <a:pPr algn="ctr">
+              <a:defRPr sz="1800" b="1">
+                <a:solidFill>
+                  <a:srgbClr val="FFFFFF"/>
+                </a:solidFill>
+              </a:defRPr>
+            </a:pPr>
+            <a:r>
+              <a:t>三级口译</a:t>
+            </a:r>
+          </a:p>
+        </p:txBody>
+      </p:sp>
+      <p:sp>
+        <p:nvSpPr>
+          <p:cNvPr id="10" name="Rectangle 9"/>
+          <p:cNvSpPr/>
+          <p:nvPr/>
+        </p:nvSpPr>
+        <p:spPr>
+          <a:xfrm>
+            <a:off x="457200" y="1645919"/>
+            <a:ext cx="3657600" cy="731520"/>
+          </a:xfrm>
+          <a:prstGeom prst="rect">
+            <a:avLst/>
+          </a:prstGeom>
+          <a:solidFill>
+            <a:srgbClr val="F0F4F8"/>
+          </a:solidFill>
+          <a:ln>
+            <a:noFill/>
+          </a:ln>
+        </p:spPr>
+        <p:style>
+          <a:lnRef idx="1">
+            <a:schemeClr val="accent1"/>
+          </a:lnRef>
+          <a:fillRef idx="3">
+            <a:schemeClr val="accent1"/>
+          </a:fillRef>
+          <a:effectRef idx="2">
+            <a:schemeClr val="accent1"/>
+          </a:effectRef>
+          <a:fontRef idx="minor">
+            <a:schemeClr val="lt1"/>
+          </a:fontRef>
+        </p:style>
+        <p:txBody>
+          <a:bodyPr rtlCol="0" anchor="ctr"/>
+          <a:lstStyle/>
+          <a:p>
+            <a:pPr algn="ctr"/>
+          </a:p>
+        </p:txBody>
+      </p:sp>
+      <p:sp>
+        <p:nvSpPr>
+          <p:cNvPr id="11" name="TextBox 10"/>
+          <p:cNvSpPr txBox="1"/>
+          <p:nvPr/>
+        </p:nvSpPr>
+        <p:spPr>
+          <a:xfrm>
+            <a:off x="548640" y="1645919"/>
+            <a:ext cx="3474720" cy="731520"/>
+          </a:xfrm>
+          <a:prstGeom prst="rect">
+            <a:avLst/>
+          </a:prstGeom>
+          <a:noFill/>
+        </p:spPr>
+        <p:txBody>
+          <a:bodyPr wrap="none">
+            <a:spAutoFit/>
+          </a:bodyPr>
+          <a:lstStyle/>
+          <a:p>
+            <a:pPr algn="ctr">
+              <a:defRPr sz="1400">
+                <a:solidFill>
+                  <a:srgbClr val="475569"/>
+                </a:solidFill>
+              </a:defRPr>
+            </a:pPr>
+            <a:r>
+              <a:t>评价标准</a:t>
+            </a:r>
+          </a:p>
+        </p:txBody>
+      </p:sp>
+      <p:sp>
+        <p:nvSpPr>
+          <p:cNvPr id="12" name="Rectangle 11"/>
+          <p:cNvSpPr/>
+          <p:nvPr/>
+        </p:nvSpPr>
+        <p:spPr>
+          <a:xfrm>
+            <a:off x="4114800" y="1645919"/>
+            <a:ext cx="3657600" cy="731520"/>
+          </a:xfrm>
+          <a:prstGeom prst="rect">
+            <a:avLst/>
+          </a:prstGeom>
+          <a:solidFill>
+            <a:srgbClr val="F0F4F8"/>
+          </a:solidFill>
+          <a:ln>
+            <a:noFill/>
+          </a:ln>
+        </p:spPr>
+        <p:style>
+          <a:lnRef idx="1">
+            <a:schemeClr val="accent1"/>
+          </a:lnRef>
+          <a:fillRef idx="3">
+            <a:schemeClr val="accent1"/>
+          </a:fillRef>
+          <a:effectRef idx="2">
+            <a:schemeClr val="accent1"/>
+          </a:effectRef>
+          <a:fontRef idx="minor">
+            <a:schemeClr val="lt1"/>
+          </a:fontRef>
+        </p:style>
+        <p:txBody>
+          <a:bodyPr rtlCol="0" anchor="ctr"/>
+          <a:lstStyle/>
+          <a:p>
+            <a:pPr algn="ctr"/>
+          </a:p>
+        </p:txBody>
+      </p:sp>
+      <p:sp>
+        <p:nvSpPr>
+          <p:cNvPr id="13" name="TextBox 12"/>
+          <p:cNvSpPr txBox="1"/>
+          <p:nvPr/>
+        </p:nvSpPr>
+        <p:spPr>
+          <a:xfrm>
+            <a:off x="4206240" y="1645919"/>
+            <a:ext cx="3474720" cy="731520"/>
+          </a:xfrm>
+          <a:prstGeom prst="rect">
+            <a:avLst/>
+          </a:prstGeom>
+          <a:noFill/>
+        </p:spPr>
+        <p:txBody>
+          <a:bodyPr wrap="none">
+            <a:spAutoFit/>
+          </a:bodyPr>
+          <a:lstStyle/>
+          <a:p>
+            <a:pPr algn="ctr">
+              <a:defRPr sz="1400">
+                <a:solidFill>
+                  <a:srgbClr val="475569"/>
+                </a:solidFill>
+              </a:defRPr>
+            </a:pPr>
+            <a:r>
+              <a:t>鼓励为主 + 可理解性</a:t>
+            </a:r>
+          </a:p>
+        </p:txBody>
+      </p:sp>
+      <p:sp>
+        <p:nvSpPr>
+          <p:cNvPr id="14" name="Rectangle 13"/>
+          <p:cNvSpPr/>
+          <p:nvPr/>
+        </p:nvSpPr>
+        <p:spPr>
+          <a:xfrm>
+            <a:off x="7772400" y="1645919"/>
+            <a:ext cx="3657600" cy="731520"/>
+          </a:xfrm>
+          <a:prstGeom prst="rect">
+            <a:avLst/>
+          </a:prstGeom>
+          <a:solidFill>
+            <a:srgbClr val="F0F4F8"/>
+          </a:solidFill>
+          <a:ln>
+            <a:noFill/>
+          </a:ln>
+        </p:spPr>
+        <p:style>
+          <a:lnRef idx="1">
+            <a:schemeClr val="accent1"/>
+          </a:lnRef>
+          <a:fillRef idx="3">
+            <a:schemeClr val="accent1"/>
+          </a:fillRef>
+          <a:effectRef idx="2">
+            <a:schemeClr val="accent1"/>
+          </a:effectRef>
+          <a:fontRef idx="minor">
+            <a:schemeClr val="lt1"/>
+          </a:fontRef>
+        </p:style>
+        <p:txBody>
+          <a:bodyPr rtlCol="0" anchor="ctr"/>
+          <a:lstStyle/>
+          <a:p>
+            <a:pPr algn="ctr"/>
+          </a:p>
+        </p:txBody>
+      </p:sp>
+      <p:sp>
+        <p:nvSpPr>
+          <p:cNvPr id="15" name="TextBox 14"/>
+          <p:cNvSpPr txBox="1"/>
+          <p:nvPr/>
+        </p:nvSpPr>
+        <p:spPr>
+          <a:xfrm>
+            <a:off x="7863840" y="1645919"/>
+            <a:ext cx="3474720" cy="731520"/>
+          </a:xfrm>
+          <a:prstGeom prst="rect">
+            <a:avLst/>
+          </a:prstGeom>
+          <a:noFill/>
+        </p:spPr>
+        <p:txBody>
+          <a:bodyPr wrap="none">
+            <a:spAutoFit/>
+          </a:bodyPr>
+          <a:lstStyle/>
+          <a:p>
+            <a:pPr algn="ctr">
+              <a:defRPr sz="1400">
+                <a:solidFill>
+                  <a:srgbClr val="475569"/>
+                </a:solidFill>
+              </a:defRPr>
+            </a:pPr>
+            <a:r>
+              <a:t>专业评分 + 信息保真</a:t>
+            </a:r>
+          </a:p>
+        </p:txBody>
+      </p:sp>
+      <p:sp>
+        <p:nvSpPr>
+          <p:cNvPr id="16" name="Rectangle 15"/>
+          <p:cNvSpPr/>
+          <p:nvPr/>
+        </p:nvSpPr>
+        <p:spPr>
+          <a:xfrm>
+            <a:off x="457200" y="2377439"/>
+            <a:ext cx="3657600" cy="731520"/>
+          </a:xfrm>
+          <a:prstGeom prst="rect">
+            <a:avLst/>
+          </a:prstGeom>
+          <a:solidFill>
+            <a:srgbClr val="FFFFFF"/>
+          </a:solidFill>
+          <a:ln>
+            <a:noFill/>
+          </a:ln>
+        </p:spPr>
+        <p:style>
+          <a:lnRef idx="1">
+            <a:schemeClr val="accent1"/>
+          </a:lnRef>
+          <a:fillRef idx="3">
+            <a:schemeClr val="accent1"/>
+          </a:fillRef>
+          <a:effectRef idx="2">
+            <a:schemeClr val="accent1"/>
+          </a:effectRef>
+          <a:fontRef idx="minor">
+            <a:schemeClr val="lt1"/>
+          </a:fontRef>
+        </p:style>
+        <p:txBody>
+          <a:bodyPr rtlCol="0" anchor="ctr"/>
+          <a:lstStyle/>
+          <a:p>
+            <a:pPr algn="ctr"/>
+          </a:p>
+        </p:txBody>
+      </p:sp>
+      <p:sp>
+        <p:nvSpPr>
+          <p:cNvPr id="17" name="TextBox 16"/>
+          <p:cNvSpPr txBox="1"/>
+          <p:nvPr/>
+        </p:nvSpPr>
+        <p:spPr>
+          <a:xfrm>
+            <a:off x="548640" y="2377439"/>
+            <a:ext cx="3474720" cy="731520"/>
+          </a:xfrm>
+          <a:prstGeom prst="rect">
+            <a:avLst/>
+          </a:prstGeom>
+          <a:noFill/>
+        </p:spPr>
+        <p:txBody>
+          <a:bodyPr wrap="none">
+            <a:spAutoFit/>
+          </a:bodyPr>
+          <a:lstStyle/>
+          <a:p>
+            <a:pPr algn="ctr">
+              <a:defRPr sz="1400">
+                <a:solidFill>
+                  <a:srgbClr val="475569"/>
+                </a:solidFill>
+              </a:defRPr>
+            </a:pPr>
+            <a:r>
+              <a:t>反馈方式</a:t>
+            </a:r>
+          </a:p>
+        </p:txBody>
+      </p:sp>
+      <p:sp>
+        <p:nvSpPr>
+          <p:cNvPr id="18" name="Rectangle 17"/>
+          <p:cNvSpPr/>
+          <p:nvPr/>
+        </p:nvSpPr>
+        <p:spPr>
+          <a:xfrm>
+            <a:off x="4114800" y="2377439"/>
+            <a:ext cx="3657600" cy="731520"/>
+          </a:xfrm>
+          <a:prstGeom prst="rect">
+            <a:avLst/>
+          </a:prstGeom>
+          <a:solidFill>
+            <a:srgbClr val="FFFFFF"/>
+          </a:solidFill>
+          <a:ln>
+            <a:noFill/>
+          </a:ln>
+        </p:spPr>
+        <p:style>
+          <a:lnRef idx="1">
+            <a:schemeClr val="accent1"/>
+          </a:lnRef>
+          <a:fillRef idx="3">
+            <a:schemeClr val="accent1"/>
+          </a:fillRef>
+          <a:effectRef idx="2">
+            <a:schemeClr val="accent1"/>
+          </a:effectRef>
+          <a:fontRef idx="minor">
+            <a:schemeClr val="lt1"/>
+          </a:fontRef>
+        </p:style>
+        <p:txBody>
+          <a:bodyPr rtlCol="0" anchor="ctr"/>
+          <a:lstStyle/>
+          <a:p>
+            <a:pPr algn="ctr"/>
+          </a:p>
+        </p:txBody>
+      </p:sp>
+      <p:sp>
+        <p:nvSpPr>
+          <p:cNvPr id="19" name="TextBox 18"/>
+          <p:cNvSpPr txBox="1"/>
+          <p:nvPr/>
+        </p:nvSpPr>
+        <p:spPr>
+          <a:xfrm>
+            <a:off x="4206240" y="2377439"/>
+            <a:ext cx="3474720" cy="731520"/>
+          </a:xfrm>
+          <a:prstGeom prst="rect">
+            <a:avLst/>
+          </a:prstGeom>
+          <a:noFill/>
+        </p:spPr>
+        <p:txBody>
+          <a:bodyPr wrap="none">
+            <a:spAutoFit/>
+          </a:bodyPr>
+          <a:lstStyle/>
+          <a:p>
+            <a:pPr algn="ctr">
+              <a:defRPr sz="1400">
+                <a:solidFill>
+                  <a:srgbClr val="475569"/>
+                </a:solidFill>
+              </a:defRPr>
+            </a:pPr>
+            <a:r>
+              <a:t>动画 + 语音表情</a:t>
+            </a:r>
+          </a:p>
+        </p:txBody>
+      </p:sp>
+      <p:sp>
+        <p:nvSpPr>
+          <p:cNvPr id="20" name="Rectangle 19"/>
+          <p:cNvSpPr/>
+          <p:nvPr/>
+        </p:nvSpPr>
+        <p:spPr>
+          <a:xfrm>
+            <a:off x="7772400" y="2377439"/>
+            <a:ext cx="3657600" cy="731520"/>
+          </a:xfrm>
+          <a:prstGeom prst="rect">
+            <a:avLst/>
+          </a:prstGeom>
+          <a:solidFill>
+            <a:srgbClr val="FFFFFF"/>
+          </a:solidFill>
+          <a:ln>
+            <a:noFill/>
+          </a:ln>
+        </p:spPr>
+        <p:style>
+          <a:lnRef idx="1">
+            <a:schemeClr val="accent1"/>
+          </a:lnRef>
+          <a:fillRef idx="3">
+            <a:schemeClr val="accent1"/>
+          </a:fillRef>
+          <a:effectRef idx="2">
+            <a:schemeClr val="accent1"/>
+          </a:effectRef>
+          <a:fontRef idx="minor">
+            <a:schemeClr val="lt1"/>
+          </a:fontRef>
+        </p:style>
+        <p:txBody>
+          <a:bodyPr rtlCol="0" anchor="ctr"/>
+          <a:lstStyle/>
+          <a:p>
+            <a:pPr algn="ctr"/>
+          </a:p>
+        </p:txBody>
+      </p:sp>
+      <p:sp>
+        <p:nvSpPr>
+          <p:cNvPr id="21" name="TextBox 20"/>
+          <p:cNvSpPr txBox="1"/>
+          <p:nvPr/>
+        </p:nvSpPr>
+        <p:spPr>
+          <a:xfrm>
+            <a:off x="7863840" y="2377439"/>
+            <a:ext cx="3474720" cy="731520"/>
+          </a:xfrm>
+          <a:prstGeom prst="rect">
+            <a:avLst/>
+          </a:prstGeom>
+          <a:noFill/>
+        </p:spPr>
+        <p:txBody>
+          <a:bodyPr wrap="none">
+            <a:spAutoFit/>
+          </a:bodyPr>
+          <a:lstStyle/>
+          <a:p>
+            <a:pPr algn="ctr">
+              <a:defRPr sz="1400">
+                <a:solidFill>
+                  <a:srgbClr val="475569"/>
+                </a:solidFill>
+              </a:defRPr>
+            </a:pPr>
+            <a:r>
+              <a:t>文本报告 + 波形对比</a:t>
+            </a:r>
+          </a:p>
+        </p:txBody>
+      </p:sp>
+      <p:sp>
+        <p:nvSpPr>
+          <p:cNvPr id="22" name="Rectangle 21"/>
+          <p:cNvSpPr/>
+          <p:nvPr/>
+        </p:nvSpPr>
+        <p:spPr>
+          <a:xfrm>
+            <a:off x="457200" y="3108959"/>
+            <a:ext cx="3657600" cy="731520"/>
+          </a:xfrm>
+          <a:prstGeom prst="rect">
+            <a:avLst/>
+          </a:prstGeom>
+          <a:solidFill>
+            <a:srgbClr val="F0F4F8"/>
+          </a:solidFill>
+          <a:ln>
+            <a:noFill/>
+          </a:ln>
+        </p:spPr>
+        <p:style>
+          <a:lnRef idx="1">
+            <a:schemeClr val="accent1"/>
+          </a:lnRef>
+          <a:fillRef idx="3">
+            <a:schemeClr val="accent1"/>
+          </a:fillRef>
+          <a:effectRef idx="2">
+            <a:schemeClr val="accent1"/>
+          </a:effectRef>
+          <a:fontRef idx="minor">
+            <a:schemeClr val="lt1"/>
+          </a:fontRef>
+        </p:style>
+        <p:txBody>
+          <a:bodyPr rtlCol="0" anchor="ctr"/>
+          <a:lstStyle/>
+          <a:p>
+            <a:pPr algn="ctr"/>
+          </a:p>
+        </p:txBody>
+      </p:sp>
+      <p:sp>
+        <p:nvSpPr>
+          <p:cNvPr id="23" name="TextBox 22"/>
+          <p:cNvSpPr txBox="1"/>
+          <p:nvPr/>
+        </p:nvSpPr>
+        <p:spPr>
+          <a:xfrm>
+            <a:off x="548640" y="3108959"/>
+            <a:ext cx="3474720" cy="731520"/>
+          </a:xfrm>
+          <a:prstGeom prst="rect">
+            <a:avLst/>
+          </a:prstGeom>
+          <a:noFill/>
+        </p:spPr>
+        <p:txBody>
+          <a:bodyPr wrap="none">
+            <a:spAutoFit/>
+          </a:bodyPr>
+          <a:lstStyle/>
+          <a:p>
+            <a:pPr algn="ctr">
+              <a:defRPr sz="1400">
+                <a:solidFill>
+                  <a:srgbClr val="475569"/>
+                </a:solidFill>
+              </a:defRPr>
+            </a:pPr>
+            <a:r>
+              <a:t>学习时长</a:t>
+            </a:r>
+          </a:p>
+        </p:txBody>
+      </p:sp>
+      <p:sp>
+        <p:nvSpPr>
+          <p:cNvPr id="24" name="Rectangle 23"/>
+          <p:cNvSpPr/>
+          <p:nvPr/>
+        </p:nvSpPr>
+        <p:spPr>
+          <a:xfrm>
+            <a:off x="4114800" y="3108959"/>
+            <a:ext cx="3657600" cy="731520"/>
+          </a:xfrm>
+          <a:prstGeom prst="rect">
+            <a:avLst/>
+          </a:prstGeom>
+          <a:solidFill>
+            <a:srgbClr val="F0F4F8"/>
+          </a:solidFill>
+          <a:ln>
+            <a:noFill/>
+          </a:ln>
+        </p:spPr>
+        <p:style>
+          <a:lnRef idx="1">
+            <a:schemeClr val="accent1"/>
+          </a:lnRef>
+          <a:fillRef idx="3">
+            <a:schemeClr val="accent1"/>
+          </a:fillRef>
+          <a:effectRef idx="2">
+            <a:schemeClr val="accent1"/>
+          </a:effectRef>
+          <a:fontRef idx="minor">
+            <a:schemeClr val="lt1"/>
+          </a:fontRef>
+        </p:style>
+        <p:txBody>
+          <a:bodyPr rtlCol="0" anchor="ctr"/>
+          <a:lstStyle/>
+          <a:p>
+            <a:pPr algn="ctr"/>
+          </a:p>
+        </p:txBody>
+      </p:sp>
+      <p:sp>
+        <p:nvSpPr>
+          <p:cNvPr id="25" name="TextBox 24"/>
+          <p:cNvSpPr txBox="1"/>
+          <p:nvPr/>
+        </p:nvSpPr>
+        <p:spPr>
+          <a:xfrm>
+            <a:off x="4206240" y="3108959"/>
+            <a:ext cx="3474720" cy="731520"/>
+          </a:xfrm>
+          <a:prstGeom prst="rect">
+            <a:avLst/>
+          </a:prstGeom>
+          <a:noFill/>
+        </p:spPr>
+        <p:txBody>
+          <a:bodyPr wrap="none">
+            <a:spAutoFit/>
+          </a:bodyPr>
+          <a:lstStyle/>
+          <a:p>
+            <a:pPr algn="ctr">
+              <a:defRPr sz="1400">
+                <a:solidFill>
+                  <a:srgbClr val="475569"/>
+                </a:solidFill>
+              </a:defRPr>
+            </a:pPr>
+            <a:r>
+              <a:t>5–15分钟/次</a:t>
+            </a:r>
+          </a:p>
+        </p:txBody>
+      </p:sp>
+      <p:sp>
+        <p:nvSpPr>
+          <p:cNvPr id="26" name="Rectangle 25"/>
+          <p:cNvSpPr/>
+          <p:nvPr/>
+        </p:nvSpPr>
+        <p:spPr>
+          <a:xfrm>
+            <a:off x="7772400" y="3108959"/>
+            <a:ext cx="3657600" cy="731520"/>
+          </a:xfrm>
+          <a:prstGeom prst="rect">
+            <a:avLst/>
+          </a:prstGeom>
+          <a:solidFill>
+            <a:srgbClr val="F0F4F8"/>
+          </a:solidFill>
+          <a:ln>
+            <a:noFill/>
+          </a:ln>
+        </p:spPr>
+        <p:style>
+          <a:lnRef idx="1">
+            <a:schemeClr val="accent1"/>
+          </a:lnRef>
+          <a:fillRef idx="3">
+            <a:schemeClr val="accent1"/>
+          </a:fillRef>
+          <a:effectRef idx="2">
+            <a:schemeClr val="accent1"/>
+          </a:effectRef>
+          <a:fontRef idx="minor">
+            <a:schemeClr val="lt1"/>
+          </a:fontRef>
+        </p:style>
+        <p:txBody>
+          <a:bodyPr rtlCol="0" anchor="ctr"/>
+          <a:lstStyle/>
+          <a:p>
+            <a:pPr algn="ctr"/>
+          </a:p>
+        </p:txBody>
+      </p:sp>
+      <p:sp>
+        <p:nvSpPr>
+          <p:cNvPr id="27" name="TextBox 26"/>
+          <p:cNvSpPr txBox="1"/>
+          <p:nvPr/>
+        </p:nvSpPr>
+        <p:spPr>
+          <a:xfrm>
+            <a:off x="7863840" y="3108959"/>
+            <a:ext cx="3474720" cy="731520"/>
+          </a:xfrm>
+          <a:prstGeom prst="rect">
+            <a:avLst/>
+          </a:prstGeom>
+          <a:noFill/>
+        </p:spPr>
+        <p:txBody>
+          <a:bodyPr wrap="none">
+            <a:spAutoFit/>
+          </a:bodyPr>
+          <a:lstStyle/>
+          <a:p>
+            <a:pPr algn="ctr">
+              <a:defRPr sz="1400">
+                <a:solidFill>
+                  <a:srgbClr val="475569"/>
+                </a:solidFill>
+              </a:defRPr>
+            </a:pPr>
+            <a:r>
+              <a:t>20–45分钟/次</a:t>
+            </a:r>
+          </a:p>
+        </p:txBody>
+      </p:sp>
+      <p:sp>
+        <p:nvSpPr>
+          <p:cNvPr id="28" name="Rounded Rectangle 27"/>
+          <p:cNvSpPr/>
+          <p:nvPr/>
+        </p:nvSpPr>
+        <p:spPr>
+          <a:xfrm>
+            <a:off x="457200" y="4572000"/>
+            <a:ext cx="10972800" cy="1371600"/>
+          </a:xfrm>
+          <a:prstGeom prst="roundRect">
+            <a:avLst/>
+          </a:prstGeom>
+          <a:solidFill>
+            <a:srgbClr val="F8FAFC"/>
+          </a:solidFill>
+          <a:ln>
+            <a:noFill/>
+          </a:ln>
+        </p:spPr>
+        <p:style>
+          <a:lnRef idx="1">
+            <a:schemeClr val="accent1"/>
+          </a:lnRef>
+          <a:fillRef idx="3">
+            <a:schemeClr val="accent1"/>
+          </a:fillRef>
+          <a:effectRef idx="2">
+            <a:schemeClr val="accent1"/>
+          </a:effectRef>
+          <a:fontRef idx="minor">
+            <a:schemeClr val="lt1"/>
+          </a:fontRef>
+        </p:style>
+        <p:txBody>
+          <a:bodyPr rtlCol="0" anchor="ctr"/>
+          <a:lstStyle/>
+          <a:p>
+            <a:pPr algn="ctr"/>
+          </a:p>
+        </p:txBody>
+      </p:sp>
+      <p:sp>
+        <p:nvSpPr>
+          <p:cNvPr id="29" name="TextBox 28"/>
+          <p:cNvSpPr txBox="1"/>
+          <p:nvPr/>
+        </p:nvSpPr>
+        <p:spPr>
+          <a:xfrm>
+            <a:off x="731520" y="4572000"/>
+            <a:ext cx="10058400" cy="365760"/>
+          </a:xfrm>
+          <a:prstGeom prst="rect">
+            <a:avLst/>
+          </a:prstGeom>
+          <a:noFill/>
+        </p:spPr>
+        <p:txBody>
+          <a:bodyPr wrap="none">
+            <a:spAutoFit/>
+          </a:bodyPr>
+          <a:lstStyle/>
+          <a:p>
+            <a:pPr>
+              <a:defRPr sz="2000" b="1">
+                <a:solidFill>
+                  <a:srgbClr val="FF6B35"/>
+                </a:solidFill>
+              </a:defRPr>
+            </a:pPr>
+            <a:r>
+              <a:t>✨ 协同可能</a:t>
+            </a:r>
+          </a:p>
+        </p:txBody>
+      </p:sp>
+      <p:sp>
+        <p:nvSpPr>
+          <p:cNvPr id="30" name="TextBox 29"/>
+          <p:cNvSpPr txBox="1"/>
+          <p:nvPr/>
+        </p:nvSpPr>
+        <p:spPr>
+          <a:xfrm>
+            <a:off x="731520" y="5029200"/>
+            <a:ext cx="10058400" cy="731520"/>
+          </a:xfrm>
+          <a:prstGeom prst="rect">
+            <a:avLst/>
+          </a:prstGeom>
+          <a:noFill/>
+        </p:spPr>
+        <p:txBody>
+          <a:bodyPr wrap="none">
+            <a:spAutoFit/>
+          </a:bodyPr>
+          <a:lstStyle/>
+          <a:p>
+            <a:pPr algn="ctr">
+              <a:defRPr sz="1600">
+                <a:solidFill>
+                  <a:srgbClr val="475569"/>
+                </a:solidFill>
+              </a:defRPr>
+            </a:pPr>
+            <a:r>
+              <a:t>少儿智能体积累的发音自信 + 语感 → 未来切入口译训练时焦虑感降低，语音识别自我修正能力更强。</a:t>
+            </a:r>
+          </a:p>
+        </p:txBody>
+      </p:sp>
+    </p:spTree>
+  </p:cSld>
+  <p:clrMapOvr>
+    <a:masterClrMapping/>
+  </p:clrMapOvr>
+</p:sld>
+</file>
+
+<file path=ppt/slides/slide9.xml><?xml version="1.0" encoding="utf-8"?>
 <p:sld xmlns:a="http://schemas.openxmlformats.org/drawingml/2006/main" xmlns:p="http://schemas.openxmlformats.org/presentationml/2006/main" xmlns:r="http://schemas.openxmlformats.org/officeDocument/2006/relationships">
   <p:cSld>
     <p:spTree>
